--- a/src/ui/public/assets/docs/CTO-Deck-RuvNet-2026.pptx
+++ b/src/ui/public/assets/docs/CTO-Deck-RuvNet-2026.pptx
@@ -2496,6 +2496,10 @@
           </a:solidFill>
           <a:ln/>
         </p:spPr>
+        <p:txBody>
+          <a:bodyPr/>
+          <a:p/>
+        </p:txBody>
       </p:sp>
       <p:pic>
         <p:nvPicPr>
@@ -3059,6 +3063,10 @@
           </a:solidFill>
           <a:ln/>
         </p:spPr>
+        <p:txBody>
+          <a:bodyPr/>
+          <a:p/>
+        </p:txBody>
       </p:sp>
       <p:sp>
         <p:nvSpPr>
@@ -3164,6 +3172,10 @@
             </a:outerShdw>
           </a:effectLst>
         </p:spPr>
+        <p:txBody>
+          <a:bodyPr/>
+          <a:p/>
+        </p:txBody>
       </p:sp>
       <p:sp>
         <p:nvSpPr>
@@ -3184,6 +3196,10 @@
           </a:solidFill>
           <a:ln/>
         </p:spPr>
+        <p:txBody>
+          <a:bodyPr/>
+          <a:p/>
+        </p:txBody>
       </p:sp>
       <p:sp>
         <p:nvSpPr>
@@ -3328,6 +3344,10 @@
             </a:outerShdw>
           </a:effectLst>
         </p:spPr>
+        <p:txBody>
+          <a:bodyPr/>
+          <a:p/>
+        </p:txBody>
       </p:sp>
       <p:sp>
         <p:nvSpPr>
@@ -3348,6 +3368,10 @@
           </a:solidFill>
           <a:ln/>
         </p:spPr>
+        <p:txBody>
+          <a:bodyPr/>
+          <a:p/>
+        </p:txBody>
       </p:sp>
       <p:sp>
         <p:nvSpPr>
@@ -3492,6 +3516,10 @@
             </a:outerShdw>
           </a:effectLst>
         </p:spPr>
+        <p:txBody>
+          <a:bodyPr/>
+          <a:p/>
+        </p:txBody>
       </p:sp>
       <p:sp>
         <p:nvSpPr>
@@ -3512,6 +3540,10 @@
           </a:solidFill>
           <a:ln/>
         </p:spPr>
+        <p:txBody>
+          <a:bodyPr/>
+          <a:p/>
+        </p:txBody>
       </p:sp>
       <p:sp>
         <p:nvSpPr>
@@ -3649,6 +3681,10 @@
           </a:solidFill>
           <a:ln/>
         </p:spPr>
+        <p:txBody>
+          <a:bodyPr/>
+          <a:p/>
+        </p:txBody>
       </p:sp>
       <p:sp>
         <p:nvSpPr>
@@ -3935,6 +3971,10 @@
           </a:solidFill>
           <a:ln/>
         </p:spPr>
+        <p:txBody>
+          <a:bodyPr/>
+          <a:p/>
+        </p:txBody>
       </p:sp>
       <p:sp>
         <p:nvSpPr>
@@ -4040,6 +4080,10 @@
             </a:outerShdw>
           </a:effectLst>
         </p:spPr>
+        <p:txBody>
+          <a:bodyPr/>
+          <a:p/>
+        </p:txBody>
       </p:sp>
       <p:sp>
         <p:nvSpPr>
@@ -4060,6 +4104,10 @@
           </a:solidFill>
           <a:ln/>
         </p:spPr>
+        <p:txBody>
+          <a:bodyPr/>
+          <a:p/>
+        </p:txBody>
       </p:sp>
       <p:sp>
         <p:nvSpPr>
@@ -4250,6 +4298,10 @@
             </a:outerShdw>
           </a:effectLst>
         </p:spPr>
+        <p:txBody>
+          <a:bodyPr/>
+          <a:p/>
+        </p:txBody>
       </p:sp>
       <p:sp>
         <p:nvSpPr>
@@ -4270,6 +4322,10 @@
           </a:solidFill>
           <a:ln/>
         </p:spPr>
+        <p:txBody>
+          <a:bodyPr/>
+          <a:p/>
+        </p:txBody>
       </p:sp>
       <p:sp>
         <p:nvSpPr>
@@ -4460,6 +4516,10 @@
             </a:outerShdw>
           </a:effectLst>
         </p:spPr>
+        <p:txBody>
+          <a:bodyPr/>
+          <a:p/>
+        </p:txBody>
       </p:sp>
       <p:sp>
         <p:nvSpPr>
@@ -4480,6 +4540,10 @@
           </a:solidFill>
           <a:ln/>
         </p:spPr>
+        <p:txBody>
+          <a:bodyPr/>
+          <a:p/>
+        </p:txBody>
       </p:sp>
       <p:sp>
         <p:nvSpPr>
@@ -4663,6 +4727,10 @@
           </a:solidFill>
           <a:ln/>
         </p:spPr>
+        <p:txBody>
+          <a:bodyPr/>
+          <a:p/>
+        </p:txBody>
       </p:sp>
       <p:sp>
         <p:nvSpPr>
@@ -5054,6 +5122,30 @@
           </a:p>
         </p:txBody>
       </p:sp>
+      <p:pic>
+        <p:nvPicPr>
+          <p:cNvPr id="31" name="Picture 30" descr="card-aimds.png"/>
+          <p:cNvPicPr>
+            <a:picLocks noChangeAspect="1"/>
+          </p:cNvPicPr>
+          <p:nvPr/>
+        </p:nvPicPr>
+        <p:blipFill>
+          <a:blip r:embed="rId3"/>
+          <a:stretch>
+            <a:fillRect/>
+          </a:stretch>
+        </p:blipFill>
+        <p:spPr>
+          <a:xfrm>
+            <a:off x="5029200" y="1371600"/>
+            <a:ext cx="3840480" cy="2560320"/>
+          </a:xfrm>
+          <a:prstGeom prst="rect">
+            <a:avLst/>
+          </a:prstGeom>
+        </p:spPr>
+      </p:pic>
     </p:spTree>
   </p:cSld>
   <p:clrMapOvr>
@@ -5105,6 +5197,10 @@
           </a:solidFill>
           <a:ln/>
         </p:spPr>
+        <p:txBody>
+          <a:bodyPr/>
+          <a:p/>
+        </p:txBody>
       </p:sp>
       <p:sp>
         <p:nvSpPr>
@@ -5210,6 +5306,10 @@
             </a:outerShdw>
           </a:effectLst>
         </p:spPr>
+        <p:txBody>
+          <a:bodyPr/>
+          <a:p/>
+        </p:txBody>
       </p:sp>
       <p:sp>
         <p:nvSpPr>
@@ -5230,6 +5330,10 @@
           </a:solidFill>
           <a:ln/>
         </p:spPr>
+        <p:txBody>
+          <a:bodyPr/>
+          <a:p/>
+        </p:txBody>
       </p:sp>
       <p:sp>
         <p:nvSpPr>
@@ -5402,6 +5506,10 @@
             </a:outerShdw>
           </a:effectLst>
         </p:spPr>
+        <p:txBody>
+          <a:bodyPr/>
+          <a:p/>
+        </p:txBody>
       </p:sp>
       <p:sp>
         <p:nvSpPr>
@@ -5422,6 +5530,10 @@
           </a:solidFill>
           <a:ln/>
         </p:spPr>
+        <p:txBody>
+          <a:bodyPr/>
+          <a:p/>
+        </p:txBody>
       </p:sp>
       <p:sp>
         <p:nvSpPr>
@@ -5626,6 +5738,10 @@
           </a:solidFill>
           <a:ln/>
         </p:spPr>
+        <p:txBody>
+          <a:bodyPr/>
+          <a:p/>
+        </p:txBody>
       </p:sp>
       <p:sp>
         <p:nvSpPr>
@@ -5760,6 +5876,10 @@
           </a:solidFill>
           <a:ln/>
         </p:spPr>
+        <p:txBody>
+          <a:bodyPr/>
+          <a:p/>
+        </p:txBody>
       </p:sp>
       <p:sp>
         <p:nvSpPr>
@@ -5894,6 +6014,10 @@
           </a:solidFill>
           <a:ln/>
         </p:spPr>
+        <p:txBody>
+          <a:bodyPr/>
+          <a:p/>
+        </p:txBody>
       </p:sp>
       <p:sp>
         <p:nvSpPr>
@@ -6028,6 +6152,10 @@
           </a:solidFill>
           <a:ln/>
         </p:spPr>
+        <p:txBody>
+          <a:bodyPr/>
+          <a:p/>
+        </p:txBody>
       </p:sp>
       <p:sp>
         <p:nvSpPr>
@@ -6419,6 +6547,30 @@
           </a:p>
         </p:txBody>
       </p:sp>
+      <p:pic>
+        <p:nvPicPr>
+          <p:cNvPr id="37" name="Picture 36" descr="deck-speed-comparison.png"/>
+          <p:cNvPicPr>
+            <a:picLocks noChangeAspect="1"/>
+          </p:cNvPicPr>
+          <p:nvPr/>
+        </p:nvPicPr>
+        <p:blipFill>
+          <a:blip r:embed="rId3"/>
+          <a:stretch>
+            <a:fillRect/>
+          </a:stretch>
+        </p:blipFill>
+        <p:spPr>
+          <a:xfrm>
+            <a:off x="5029200" y="1371600"/>
+            <a:ext cx="3840480" cy="2560320"/>
+          </a:xfrm>
+          <a:prstGeom prst="rect">
+            <a:avLst/>
+          </a:prstGeom>
+        </p:spPr>
+      </p:pic>
     </p:spTree>
   </p:cSld>
   <p:clrMapOvr>
@@ -6470,6 +6622,10 @@
           </a:solidFill>
           <a:ln/>
         </p:spPr>
+        <p:txBody>
+          <a:bodyPr/>
+          <a:p/>
+        </p:txBody>
       </p:sp>
       <p:sp>
         <p:nvSpPr>
@@ -6575,6 +6731,10 @@
             </a:outerShdw>
           </a:effectLst>
         </p:spPr>
+        <p:txBody>
+          <a:bodyPr/>
+          <a:p/>
+        </p:txBody>
       </p:sp>
       <p:sp>
         <p:nvSpPr>
@@ -6595,6 +6755,10 @@
           </a:solidFill>
           <a:ln/>
         </p:spPr>
+        <p:txBody>
+          <a:bodyPr/>
+          <a:p/>
+        </p:txBody>
       </p:sp>
       <p:sp>
         <p:nvSpPr>
@@ -6830,6 +6994,10 @@
             </a:outerShdw>
           </a:effectLst>
         </p:spPr>
+        <p:txBody>
+          <a:bodyPr/>
+          <a:p/>
+        </p:txBody>
       </p:sp>
       <p:sp>
         <p:nvSpPr>
@@ -6850,6 +7018,10 @@
           </a:solidFill>
           <a:ln/>
         </p:spPr>
+        <p:txBody>
+          <a:bodyPr/>
+          <a:p/>
+        </p:txBody>
       </p:sp>
       <p:sp>
         <p:nvSpPr>
@@ -8180,6 +8352,30 @@
           </a:p>
         </p:txBody>
       </p:sp>
+      <p:pic>
+        <p:nvPicPr>
+          <p:cNvPr id="23" name="Picture 22" descr="deck-speed-comparison.png"/>
+          <p:cNvPicPr>
+            <a:picLocks noChangeAspect="1"/>
+          </p:cNvPicPr>
+          <p:nvPr/>
+        </p:nvPicPr>
+        <p:blipFill>
+          <a:blip r:embed="rId3"/>
+          <a:stretch>
+            <a:fillRect/>
+          </a:stretch>
+        </p:blipFill>
+        <p:spPr>
+          <a:xfrm>
+            <a:off x="5029200" y="1371600"/>
+            <a:ext cx="3840480" cy="2560320"/>
+          </a:xfrm>
+          <a:prstGeom prst="rect">
+            <a:avLst/>
+          </a:prstGeom>
+        </p:spPr>
+      </p:pic>
     </p:spTree>
   </p:cSld>
   <p:clrMapOvr>
@@ -8231,6 +8427,10 @@
           </a:solidFill>
           <a:ln/>
         </p:spPr>
+        <p:txBody>
+          <a:bodyPr/>
+          <a:p/>
+        </p:txBody>
       </p:sp>
       <p:sp>
         <p:nvSpPr>
@@ -8336,6 +8536,10 @@
             </a:outerShdw>
           </a:effectLst>
         </p:spPr>
+        <p:txBody>
+          <a:bodyPr/>
+          <a:p/>
+        </p:txBody>
       </p:sp>
       <p:sp>
         <p:nvSpPr>
@@ -8356,6 +8560,10 @@
           </a:solidFill>
           <a:ln/>
         </p:spPr>
+        <p:txBody>
+          <a:bodyPr/>
+          <a:p/>
+        </p:txBody>
       </p:sp>
       <p:sp>
         <p:nvSpPr>
@@ -8570,6 +8778,10 @@
             </a:outerShdw>
           </a:effectLst>
         </p:spPr>
+        <p:txBody>
+          <a:bodyPr/>
+          <a:p/>
+        </p:txBody>
       </p:sp>
       <p:sp>
         <p:nvSpPr>
@@ -8590,6 +8802,10 @@
           </a:solidFill>
           <a:ln/>
         </p:spPr>
+        <p:txBody>
+          <a:bodyPr/>
+          <a:p/>
+        </p:txBody>
       </p:sp>
       <p:sp>
         <p:nvSpPr>
@@ -8836,6 +9052,10 @@
           </a:solidFill>
           <a:ln/>
         </p:spPr>
+        <p:txBody>
+          <a:bodyPr/>
+          <a:p/>
+        </p:txBody>
       </p:sp>
       <p:sp>
         <p:nvSpPr>
@@ -8973,6 +9193,10 @@
           </a:solidFill>
           <a:ln/>
         </p:spPr>
+        <p:txBody>
+          <a:bodyPr/>
+          <a:p/>
+        </p:txBody>
       </p:sp>
       <p:sp>
         <p:nvSpPr>
@@ -9110,6 +9334,10 @@
           </a:solidFill>
           <a:ln/>
         </p:spPr>
+        <p:txBody>
+          <a:bodyPr/>
+          <a:p/>
+        </p:txBody>
       </p:sp>
       <p:sp>
         <p:nvSpPr>
@@ -9267,6 +9495,30 @@
           </a:p>
         </p:txBody>
       </p:sp>
+      <p:pic>
+        <p:nvPicPr>
+          <p:cNvPr id="27" name="Picture 26" descr="deck-speed-comparison.png"/>
+          <p:cNvPicPr>
+            <a:picLocks noChangeAspect="1"/>
+          </p:cNvPicPr>
+          <p:nvPr/>
+        </p:nvPicPr>
+        <p:blipFill>
+          <a:blip r:embed="rId3"/>
+          <a:stretch>
+            <a:fillRect/>
+          </a:stretch>
+        </p:blipFill>
+        <p:spPr>
+          <a:xfrm>
+            <a:off x="5029200" y="1371600"/>
+            <a:ext cx="3840480" cy="2560320"/>
+          </a:xfrm>
+          <a:prstGeom prst="rect">
+            <a:avLst/>
+          </a:prstGeom>
+        </p:spPr>
+      </p:pic>
     </p:spTree>
   </p:cSld>
   <p:clrMapOvr>
@@ -9318,6 +9570,10 @@
           </a:solidFill>
           <a:ln/>
         </p:spPr>
+        <p:txBody>
+          <a:bodyPr/>
+          <a:p/>
+        </p:txBody>
       </p:sp>
       <p:pic>
         <p:nvPicPr>
@@ -9449,6 +9705,10 @@
             </a:outerShdw>
           </a:effectLst>
         </p:spPr>
+        <p:txBody>
+          <a:bodyPr/>
+          <a:p/>
+        </p:txBody>
       </p:sp>
       <p:sp>
         <p:nvSpPr>
@@ -9469,6 +9729,10 @@
           </a:solidFill>
           <a:ln/>
         </p:spPr>
+        <p:txBody>
+          <a:bodyPr/>
+          <a:p/>
+        </p:txBody>
       </p:sp>
       <p:sp>
         <p:nvSpPr>
@@ -10729,6 +10993,10 @@
           </a:solidFill>
           <a:ln/>
         </p:spPr>
+        <p:txBody>
+          <a:bodyPr/>
+          <a:p/>
+        </p:txBody>
       </p:sp>
       <p:sp>
         <p:nvSpPr>
@@ -10769,6 +11037,30 @@
           </a:p>
         </p:txBody>
       </p:sp>
+      <p:pic>
+        <p:nvPicPr>
+          <p:cNvPr id="26" name="Picture 25" descr="card-ruflo.png"/>
+          <p:cNvPicPr>
+            <a:picLocks noChangeAspect="1"/>
+          </p:cNvPicPr>
+          <p:nvPr/>
+        </p:nvPicPr>
+        <p:blipFill>
+          <a:blip r:embed="rId4"/>
+          <a:stretch>
+            <a:fillRect/>
+          </a:stretch>
+        </p:blipFill>
+        <p:spPr>
+          <a:xfrm>
+            <a:off x="5029200" y="1371600"/>
+            <a:ext cx="3840480" cy="2560320"/>
+          </a:xfrm>
+          <a:prstGeom prst="rect">
+            <a:avLst/>
+          </a:prstGeom>
+        </p:spPr>
+      </p:pic>
     </p:spTree>
   </p:cSld>
   <p:clrMapOvr>
@@ -10820,6 +11112,10 @@
           </a:solidFill>
           <a:ln/>
         </p:spPr>
+        <p:txBody>
+          <a:bodyPr/>
+          <a:p/>
+        </p:txBody>
       </p:sp>
       <p:sp>
         <p:nvSpPr>
@@ -13435,6 +13731,30 @@
           </a:p>
         </p:txBody>
       </p:sp>
+      <p:pic>
+        <p:nvPicPr>
+          <p:cNvPr id="18" name="Picture 17" descr="deck-speed-comparison.png"/>
+          <p:cNvPicPr>
+            <a:picLocks noChangeAspect="1"/>
+          </p:cNvPicPr>
+          <p:nvPr/>
+        </p:nvPicPr>
+        <p:blipFill>
+          <a:blip r:embed="rId3"/>
+          <a:stretch>
+            <a:fillRect/>
+          </a:stretch>
+        </p:blipFill>
+        <p:spPr>
+          <a:xfrm>
+            <a:off x="5029200" y="1371600"/>
+            <a:ext cx="3840480" cy="2560320"/>
+          </a:xfrm>
+          <a:prstGeom prst="rect">
+            <a:avLst/>
+          </a:prstGeom>
+        </p:spPr>
+      </p:pic>
     </p:spTree>
   </p:cSld>
   <p:clrMapOvr>
@@ -13486,6 +13806,10 @@
           </a:solidFill>
           <a:ln/>
         </p:spPr>
+        <p:txBody>
+          <a:bodyPr/>
+          <a:p/>
+        </p:txBody>
       </p:sp>
       <p:sp>
         <p:nvSpPr>
@@ -13591,6 +13915,10 @@
             </a:outerShdw>
           </a:effectLst>
         </p:spPr>
+        <p:txBody>
+          <a:bodyPr/>
+          <a:p/>
+        </p:txBody>
       </p:sp>
       <p:sp>
         <p:nvSpPr>
@@ -13611,6 +13939,10 @@
           </a:solidFill>
           <a:ln/>
         </p:spPr>
+        <p:txBody>
+          <a:bodyPr/>
+          <a:p/>
+        </p:txBody>
       </p:sp>
       <p:sp>
         <p:nvSpPr>
@@ -13783,6 +14115,10 @@
             </a:outerShdw>
           </a:effectLst>
         </p:spPr>
+        <p:txBody>
+          <a:bodyPr/>
+          <a:p/>
+        </p:txBody>
       </p:sp>
       <p:sp>
         <p:nvSpPr>
@@ -13803,6 +14139,10 @@
           </a:solidFill>
           <a:ln/>
         </p:spPr>
+        <p:txBody>
+          <a:bodyPr/>
+          <a:p/>
+        </p:txBody>
       </p:sp>
       <p:sp>
         <p:nvSpPr>
@@ -14007,6 +14347,10 @@
           </a:solidFill>
           <a:ln/>
         </p:spPr>
+        <p:txBody>
+          <a:bodyPr/>
+          <a:p/>
+        </p:txBody>
       </p:sp>
       <p:sp>
         <p:nvSpPr>
@@ -14105,6 +14449,10 @@
           </a:solidFill>
           <a:ln/>
         </p:spPr>
+        <p:txBody>
+          <a:bodyPr/>
+          <a:p/>
+        </p:txBody>
       </p:sp>
       <p:sp>
         <p:nvSpPr>
@@ -14203,6 +14551,10 @@
           </a:solidFill>
           <a:ln/>
         </p:spPr>
+        <p:txBody>
+          <a:bodyPr/>
+          <a:p/>
+        </p:txBody>
       </p:sp>
       <p:sp>
         <p:nvSpPr>
@@ -14301,6 +14653,10 @@
           </a:solidFill>
           <a:ln/>
         </p:spPr>
+        <p:txBody>
+          <a:bodyPr/>
+          <a:p/>
+        </p:txBody>
       </p:sp>
       <p:sp>
         <p:nvSpPr>
@@ -14399,6 +14755,10 @@
           </a:solidFill>
           <a:ln/>
         </p:spPr>
+        <p:txBody>
+          <a:bodyPr/>
+          <a:p/>
+        </p:txBody>
       </p:sp>
       <p:sp>
         <p:nvSpPr>
@@ -14497,6 +14857,10 @@
           </a:solidFill>
           <a:ln/>
         </p:spPr>
+        <p:txBody>
+          <a:bodyPr/>
+          <a:p/>
+        </p:txBody>
       </p:sp>
       <p:sp>
         <p:nvSpPr>
@@ -14595,6 +14959,10 @@
           </a:solidFill>
           <a:ln/>
         </p:spPr>
+        <p:txBody>
+          <a:bodyPr/>
+          <a:p/>
+        </p:txBody>
       </p:sp>
       <p:sp>
         <p:nvSpPr>
@@ -14635,6 +15003,30 @@
           </a:p>
         </p:txBody>
       </p:sp>
+      <p:pic>
+        <p:nvPicPr>
+          <p:cNvPr id="34" name="Picture 33" descr="card-aimds.png"/>
+          <p:cNvPicPr>
+            <a:picLocks noChangeAspect="1"/>
+          </p:cNvPicPr>
+          <p:nvPr/>
+        </p:nvPicPr>
+        <p:blipFill>
+          <a:blip r:embed="rId3"/>
+          <a:stretch>
+            <a:fillRect/>
+          </a:stretch>
+        </p:blipFill>
+        <p:spPr>
+          <a:xfrm>
+            <a:off x="5029200" y="1371600"/>
+            <a:ext cx="3840480" cy="2560320"/>
+          </a:xfrm>
+          <a:prstGeom prst="rect">
+            <a:avLst/>
+          </a:prstGeom>
+        </p:spPr>
+      </p:pic>
     </p:spTree>
   </p:cSld>
   <p:clrMapOvr>
@@ -14686,6 +15078,10 @@
           </a:solidFill>
           <a:ln/>
         </p:spPr>
+        <p:txBody>
+          <a:bodyPr/>
+          <a:p/>
+        </p:txBody>
       </p:sp>
       <p:sp>
         <p:nvSpPr>
@@ -14791,6 +15187,10 @@
             </a:outerShdw>
           </a:effectLst>
         </p:spPr>
+        <p:txBody>
+          <a:bodyPr/>
+          <a:p/>
+        </p:txBody>
       </p:sp>
       <p:sp>
         <p:nvSpPr>
@@ -14811,6 +15211,10 @@
           </a:solidFill>
           <a:ln/>
         </p:spPr>
+        <p:txBody>
+          <a:bodyPr/>
+          <a:p/>
+        </p:txBody>
       </p:sp>
       <p:sp>
         <p:nvSpPr>
@@ -15022,6 +15426,10 @@
             </a:outerShdw>
           </a:effectLst>
         </p:spPr>
+        <p:txBody>
+          <a:bodyPr/>
+          <a:p/>
+        </p:txBody>
       </p:sp>
       <p:sp>
         <p:nvSpPr>
@@ -15042,6 +15450,10 @@
           </a:solidFill>
           <a:ln/>
         </p:spPr>
+        <p:txBody>
+          <a:bodyPr/>
+          <a:p/>
+        </p:txBody>
       </p:sp>
       <p:sp>
         <p:nvSpPr>
@@ -15253,6 +15665,10 @@
             </a:outerShdw>
           </a:effectLst>
         </p:spPr>
+        <p:txBody>
+          <a:bodyPr/>
+          <a:p/>
+        </p:txBody>
       </p:sp>
       <p:sp>
         <p:nvSpPr>
@@ -15273,6 +15689,10 @@
           </a:solidFill>
           <a:ln/>
         </p:spPr>
+        <p:txBody>
+          <a:bodyPr/>
+          <a:p/>
+        </p:txBody>
       </p:sp>
       <p:sp>
         <p:nvSpPr>
@@ -15484,6 +15904,10 @@
             </a:outerShdw>
           </a:effectLst>
         </p:spPr>
+        <p:txBody>
+          <a:bodyPr/>
+          <a:p/>
+        </p:txBody>
       </p:sp>
       <p:sp>
         <p:nvSpPr>
@@ -15504,6 +15928,10 @@
           </a:solidFill>
           <a:ln/>
         </p:spPr>
+        <p:txBody>
+          <a:bodyPr/>
+          <a:p/>
+        </p:txBody>
       </p:sp>
       <p:sp>
         <p:nvSpPr>
@@ -15708,6 +16136,10 @@
           </a:solidFill>
           <a:ln/>
         </p:spPr>
+        <p:txBody>
+          <a:bodyPr/>
+          <a:p/>
+        </p:txBody>
       </p:sp>
       <p:sp>
         <p:nvSpPr>
@@ -15748,6 +16180,30 @@
           </a:p>
         </p:txBody>
       </p:sp>
+      <p:pic>
+        <p:nvPicPr>
+          <p:cNvPr id="27" name="Picture 26" descr="deck-speed-comparison.png"/>
+          <p:cNvPicPr>
+            <a:picLocks noChangeAspect="1"/>
+          </p:cNvPicPr>
+          <p:nvPr/>
+        </p:nvPicPr>
+        <p:blipFill>
+          <a:blip r:embed="rId3"/>
+          <a:stretch>
+            <a:fillRect/>
+          </a:stretch>
+        </p:blipFill>
+        <p:spPr>
+          <a:xfrm>
+            <a:off x="5029200" y="1371600"/>
+            <a:ext cx="3840480" cy="2560320"/>
+          </a:xfrm>
+          <a:prstGeom prst="rect">
+            <a:avLst/>
+          </a:prstGeom>
+        </p:spPr>
+      </p:pic>
     </p:spTree>
   </p:cSld>
   <p:clrMapOvr>
@@ -15799,6 +16255,10 @@
           </a:solidFill>
           <a:ln/>
         </p:spPr>
+        <p:txBody>
+          <a:bodyPr/>
+          <a:p/>
+        </p:txBody>
       </p:sp>
       <p:sp>
         <p:nvSpPr>
@@ -16648,6 +17108,10 @@
           </a:solidFill>
           <a:ln/>
         </p:spPr>
+        <p:txBody>
+          <a:bodyPr/>
+          <a:p/>
+        </p:txBody>
       </p:sp>
       <p:sp>
         <p:nvSpPr>
@@ -22142,6 +22606,10 @@
           </a:solidFill>
           <a:ln/>
         </p:spPr>
+        <p:txBody>
+          <a:bodyPr/>
+          <a:p/>
+        </p:txBody>
       </p:sp>
       <p:sp>
         <p:nvSpPr>
@@ -22273,6 +22741,10 @@
             </a:outerShdw>
           </a:effectLst>
         </p:spPr>
+        <p:txBody>
+          <a:bodyPr/>
+          <a:p/>
+        </p:txBody>
       </p:sp>
       <p:sp>
         <p:nvSpPr>
@@ -22293,6 +22765,10 @@
           </a:solidFill>
           <a:ln/>
         </p:spPr>
+        <p:txBody>
+          <a:bodyPr/>
+          <a:p/>
+        </p:txBody>
       </p:sp>
       <p:sp>
         <p:nvSpPr>
@@ -22398,6 +22874,10 @@
             </a:outerShdw>
           </a:effectLst>
         </p:spPr>
+        <p:txBody>
+          <a:bodyPr/>
+          <a:p/>
+        </p:txBody>
       </p:sp>
       <p:sp>
         <p:nvSpPr>
@@ -22418,6 +22898,10 @@
           </a:solidFill>
           <a:ln/>
         </p:spPr>
+        <p:txBody>
+          <a:bodyPr/>
+          <a:p/>
+        </p:txBody>
       </p:sp>
       <p:sp>
         <p:nvSpPr>
@@ -22562,6 +23046,10 @@
             </a:outerShdw>
           </a:effectLst>
         </p:spPr>
+        <p:txBody>
+          <a:bodyPr/>
+          <a:p/>
+        </p:txBody>
       </p:sp>
       <p:sp>
         <p:nvSpPr>
@@ -22582,6 +23070,10 @@
           </a:solidFill>
           <a:ln/>
         </p:spPr>
+        <p:txBody>
+          <a:bodyPr/>
+          <a:p/>
+        </p:txBody>
       </p:sp>
       <p:sp>
         <p:nvSpPr>
@@ -22743,6 +23235,10 @@
             </a:outerShdw>
           </a:effectLst>
         </p:spPr>
+        <p:txBody>
+          <a:bodyPr/>
+          <a:p/>
+        </p:txBody>
       </p:sp>
       <p:sp>
         <p:nvSpPr>
@@ -22763,6 +23259,10 @@
           </a:solidFill>
           <a:ln/>
         </p:spPr>
+        <p:txBody>
+          <a:bodyPr/>
+          <a:p/>
+        </p:txBody>
       </p:sp>
       <p:sp>
         <p:nvSpPr>
@@ -22907,6 +23407,10 @@
             </a:outerShdw>
           </a:effectLst>
         </p:spPr>
+        <p:txBody>
+          <a:bodyPr/>
+          <a:p/>
+        </p:txBody>
       </p:sp>
       <p:sp>
         <p:nvSpPr>
@@ -22927,6 +23431,10 @@
           </a:solidFill>
           <a:ln/>
         </p:spPr>
+        <p:txBody>
+          <a:bodyPr/>
+          <a:p/>
+        </p:txBody>
       </p:sp>
       <p:sp>
         <p:nvSpPr>
@@ -23071,6 +23579,10 @@
             </a:outerShdw>
           </a:effectLst>
         </p:spPr>
+        <p:txBody>
+          <a:bodyPr/>
+          <a:p/>
+        </p:txBody>
       </p:sp>
       <p:sp>
         <p:nvSpPr>
@@ -23091,6 +23603,10 @@
           </a:solidFill>
           <a:ln/>
         </p:spPr>
+        <p:txBody>
+          <a:bodyPr/>
+          <a:p/>
+        </p:txBody>
       </p:sp>
       <p:sp>
         <p:nvSpPr>
@@ -23235,6 +23751,10 @@
             </a:outerShdw>
           </a:effectLst>
         </p:spPr>
+        <p:txBody>
+          <a:bodyPr/>
+          <a:p/>
+        </p:txBody>
       </p:sp>
       <p:sp>
         <p:nvSpPr>
@@ -23255,6 +23775,10 @@
           </a:solidFill>
           <a:ln/>
         </p:spPr>
+        <p:txBody>
+          <a:bodyPr/>
+          <a:p/>
+        </p:txBody>
       </p:sp>
       <p:sp>
         <p:nvSpPr>
@@ -23314,6 +23838,10 @@
           </a:solidFill>
           <a:ln/>
         </p:spPr>
+        <p:txBody>
+          <a:bodyPr/>
+          <a:p/>
+        </p:txBody>
       </p:sp>
       <p:sp>
         <p:nvSpPr>
@@ -23490,6 +24018,10 @@
           </a:solidFill>
           <a:ln/>
         </p:spPr>
+        <p:txBody>
+          <a:bodyPr/>
+          <a:p/>
+        </p:txBody>
       </p:sp>
       <p:sp>
         <p:nvSpPr>
@@ -23549,6 +24081,10 @@
           </a:solidFill>
           <a:ln/>
         </p:spPr>
+        <p:txBody>
+          <a:bodyPr/>
+          <a:p/>
+        </p:txBody>
       </p:sp>
       <p:sp>
         <p:nvSpPr>
@@ -23784,6 +24320,30 @@
           </a:p>
         </p:txBody>
       </p:sp>
+      <p:pic>
+        <p:nvPicPr>
+          <p:cNvPr id="52" name="Picture 51" descr="deck-speed-comparison.png"/>
+          <p:cNvPicPr>
+            <a:picLocks noChangeAspect="1"/>
+          </p:cNvPicPr>
+          <p:nvPr/>
+        </p:nvPicPr>
+        <p:blipFill>
+          <a:blip r:embed="rId4"/>
+          <a:stretch>
+            <a:fillRect/>
+          </a:stretch>
+        </p:blipFill>
+        <p:spPr>
+          <a:xfrm>
+            <a:off x="5029200" y="1371600"/>
+            <a:ext cx="3840480" cy="2560320"/>
+          </a:xfrm>
+          <a:prstGeom prst="rect">
+            <a:avLst/>
+          </a:prstGeom>
+        </p:spPr>
+      </p:pic>
     </p:spTree>
   </p:cSld>
   <p:clrMapOvr>
@@ -23835,6 +24395,10 @@
           </a:solidFill>
           <a:ln/>
         </p:spPr>
+        <p:txBody>
+          <a:bodyPr/>
+          <a:p/>
+        </p:txBody>
       </p:sp>
       <p:sp>
         <p:nvSpPr>
@@ -23940,6 +24504,10 @@
             </a:outerShdw>
           </a:effectLst>
         </p:spPr>
+        <p:txBody>
+          <a:bodyPr/>
+          <a:p/>
+        </p:txBody>
       </p:sp>
       <p:sp>
         <p:nvSpPr>
@@ -23960,6 +24528,10 @@
           </a:solidFill>
           <a:ln/>
         </p:spPr>
+        <p:txBody>
+          <a:bodyPr/>
+          <a:p/>
+        </p:txBody>
       </p:sp>
       <p:sp>
         <p:nvSpPr>
@@ -24192,6 +24764,10 @@
             </a:outerShdw>
           </a:effectLst>
         </p:spPr>
+        <p:txBody>
+          <a:bodyPr/>
+          <a:p/>
+        </p:txBody>
       </p:sp>
       <p:sp>
         <p:nvSpPr>
@@ -24212,6 +24788,10 @@
           </a:solidFill>
           <a:ln/>
         </p:spPr>
+        <p:txBody>
+          <a:bodyPr/>
+          <a:p/>
+        </p:txBody>
       </p:sp>
       <p:sp>
         <p:nvSpPr>
@@ -24437,6 +25017,10 @@
           </a:solidFill>
           <a:ln/>
         </p:spPr>
+        <p:txBody>
+          <a:bodyPr/>
+          <a:p/>
+        </p:txBody>
       </p:sp>
       <p:sp>
         <p:nvSpPr>
@@ -24672,6 +25256,30 @@
           </a:p>
         </p:txBody>
       </p:sp>
+      <p:pic>
+        <p:nvPicPr>
+          <p:cNvPr id="22" name="Picture 21" descr="deck-speed-comparison.png"/>
+          <p:cNvPicPr>
+            <a:picLocks noChangeAspect="1"/>
+          </p:cNvPicPr>
+          <p:nvPr/>
+        </p:nvPicPr>
+        <p:blipFill>
+          <a:blip r:embed="rId3"/>
+          <a:stretch>
+            <a:fillRect/>
+          </a:stretch>
+        </p:blipFill>
+        <p:spPr>
+          <a:xfrm>
+            <a:off x="5029200" y="1371600"/>
+            <a:ext cx="3840480" cy="2560320"/>
+          </a:xfrm>
+          <a:prstGeom prst="rect">
+            <a:avLst/>
+          </a:prstGeom>
+        </p:spPr>
+      </p:pic>
     </p:spTree>
   </p:cSld>
   <p:clrMapOvr>
@@ -24723,6 +25331,10 @@
           </a:solidFill>
           <a:ln/>
         </p:spPr>
+        <p:txBody>
+          <a:bodyPr/>
+          <a:p/>
+        </p:txBody>
       </p:sp>
       <p:sp>
         <p:nvSpPr>
@@ -24828,6 +25440,10 @@
             </a:outerShdw>
           </a:effectLst>
         </p:spPr>
+        <p:txBody>
+          <a:bodyPr/>
+          <a:p/>
+        </p:txBody>
       </p:sp>
       <p:sp>
         <p:nvSpPr>
@@ -24848,6 +25464,10 @@
           </a:solidFill>
           <a:ln/>
         </p:spPr>
+        <p:txBody>
+          <a:bodyPr/>
+          <a:p/>
+        </p:txBody>
       </p:sp>
       <p:sp>
         <p:nvSpPr>
@@ -25209,6 +25829,10 @@
           </a:solidFill>
           <a:ln/>
         </p:spPr>
+        <p:txBody>
+          <a:bodyPr/>
+          <a:p/>
+        </p:txBody>
       </p:sp>
       <p:sp>
         <p:nvSpPr>
@@ -25275,6 +25899,10 @@
             </a:outerShdw>
           </a:effectLst>
         </p:spPr>
+        <p:txBody>
+          <a:bodyPr/>
+          <a:p/>
+        </p:txBody>
       </p:sp>
       <p:sp>
         <p:nvSpPr>
@@ -25295,6 +25923,10 @@
           </a:solidFill>
           <a:ln/>
         </p:spPr>
+        <p:txBody>
+          <a:bodyPr/>
+          <a:p/>
+        </p:txBody>
       </p:sp>
       <p:sp>
         <p:nvSpPr>
@@ -25488,6 +26120,10 @@
             </a:outerShdw>
           </a:effectLst>
         </p:spPr>
+        <p:txBody>
+          <a:bodyPr/>
+          <a:p/>
+        </p:txBody>
       </p:sp>
       <p:sp>
         <p:nvSpPr>
@@ -25508,6 +26144,10 @@
           </a:solidFill>
           <a:ln/>
         </p:spPr>
+        <p:txBody>
+          <a:bodyPr/>
+          <a:p/>
+        </p:txBody>
       </p:sp>
       <p:sp>
         <p:nvSpPr>
@@ -25694,6 +26334,10 @@
           </a:solidFill>
           <a:ln/>
         </p:spPr>
+        <p:txBody>
+          <a:bodyPr/>
+          <a:p/>
+        </p:txBody>
       </p:sp>
       <p:sp>
         <p:nvSpPr>
@@ -25734,6 +26378,30 @@
           </a:p>
         </p:txBody>
       </p:sp>
+      <p:pic>
+        <p:nvPicPr>
+          <p:cNvPr id="26" name="Picture 25" descr="card-ruvector.png"/>
+          <p:cNvPicPr>
+            <a:picLocks noChangeAspect="1"/>
+          </p:cNvPicPr>
+          <p:nvPr/>
+        </p:nvPicPr>
+        <p:blipFill>
+          <a:blip r:embed="rId3"/>
+          <a:stretch>
+            <a:fillRect/>
+          </a:stretch>
+        </p:blipFill>
+        <p:spPr>
+          <a:xfrm>
+            <a:off x="5029200" y="1371600"/>
+            <a:ext cx="3840480" cy="2560320"/>
+          </a:xfrm>
+          <a:prstGeom prst="rect">
+            <a:avLst/>
+          </a:prstGeom>
+        </p:spPr>
+      </p:pic>
     </p:spTree>
   </p:cSld>
   <p:clrMapOvr>
@@ -25785,6 +26453,10 @@
           </a:solidFill>
           <a:ln/>
         </p:spPr>
+        <p:txBody>
+          <a:bodyPr/>
+          <a:p/>
+        </p:txBody>
       </p:sp>
       <p:sp>
         <p:nvSpPr>
@@ -25890,6 +26562,10 @@
             </a:outerShdw>
           </a:effectLst>
         </p:spPr>
+        <p:txBody>
+          <a:bodyPr/>
+          <a:p/>
+        </p:txBody>
       </p:sp>
       <p:sp>
         <p:nvSpPr>
@@ -25910,6 +26586,10 @@
           </a:solidFill>
           <a:ln/>
         </p:spPr>
+        <p:txBody>
+          <a:bodyPr/>
+          <a:p/>
+        </p:txBody>
       </p:sp>
       <p:sp>
         <p:nvSpPr>
@@ -26015,6 +26695,10 @@
             </a:outerShdw>
           </a:effectLst>
         </p:spPr>
+        <p:txBody>
+          <a:bodyPr/>
+          <a:p/>
+        </p:txBody>
       </p:sp>
       <p:sp>
         <p:nvSpPr>
@@ -26035,6 +26719,10 @@
           </a:solidFill>
           <a:ln/>
         </p:spPr>
+        <p:txBody>
+          <a:bodyPr/>
+          <a:p/>
+        </p:txBody>
       </p:sp>
       <p:sp>
         <p:nvSpPr>
@@ -26140,6 +26828,10 @@
             </a:outerShdw>
           </a:effectLst>
         </p:spPr>
+        <p:txBody>
+          <a:bodyPr/>
+          <a:p/>
+        </p:txBody>
       </p:sp>
       <p:sp>
         <p:nvSpPr>
@@ -26160,6 +26852,10 @@
           </a:solidFill>
           <a:ln/>
         </p:spPr>
+        <p:txBody>
+          <a:bodyPr/>
+          <a:p/>
+        </p:txBody>
       </p:sp>
       <p:sp>
         <p:nvSpPr>
@@ -26265,6 +26961,10 @@
             </a:outerShdw>
           </a:effectLst>
         </p:spPr>
+        <p:txBody>
+          <a:bodyPr/>
+          <a:p/>
+        </p:txBody>
       </p:sp>
       <p:sp>
         <p:nvSpPr>
@@ -26285,6 +26985,10 @@
           </a:solidFill>
           <a:ln/>
         </p:spPr>
+        <p:txBody>
+          <a:bodyPr/>
+          <a:p/>
+        </p:txBody>
       </p:sp>
       <p:sp>
         <p:nvSpPr>
@@ -26390,6 +27094,10 @@
             </a:outerShdw>
           </a:effectLst>
         </p:spPr>
+        <p:txBody>
+          <a:bodyPr/>
+          <a:p/>
+        </p:txBody>
       </p:sp>
       <p:sp>
         <p:nvSpPr>
@@ -26410,6 +27118,10 @@
           </a:solidFill>
           <a:ln/>
         </p:spPr>
+        <p:txBody>
+          <a:bodyPr/>
+          <a:p/>
+        </p:txBody>
       </p:sp>
       <p:sp>
         <p:nvSpPr>
@@ -26515,6 +27227,10 @@
             </a:outerShdw>
           </a:effectLst>
         </p:spPr>
+        <p:txBody>
+          <a:bodyPr/>
+          <a:p/>
+        </p:txBody>
       </p:sp>
       <p:sp>
         <p:nvSpPr>
@@ -26535,6 +27251,10 @@
           </a:solidFill>
           <a:ln/>
         </p:spPr>
+        <p:txBody>
+          <a:bodyPr/>
+          <a:p/>
+        </p:txBody>
       </p:sp>
       <p:sp>
         <p:nvSpPr>
@@ -26633,6 +27353,10 @@
           </a:solidFill>
           <a:ln/>
         </p:spPr>
+        <p:txBody>
+          <a:bodyPr/>
+          <a:p/>
+        </p:txBody>
       </p:sp>
       <p:sp>
         <p:nvSpPr>
@@ -26790,6 +27514,30 @@
           </a:p>
         </p:txBody>
       </p:sp>
+      <p:pic>
+        <p:nvPicPr>
+          <p:cNvPr id="34" name="Picture 33" descr="deck-compression.png"/>
+          <p:cNvPicPr>
+            <a:picLocks noChangeAspect="1"/>
+          </p:cNvPicPr>
+          <p:nvPr/>
+        </p:nvPicPr>
+        <p:blipFill>
+          <a:blip r:embed="rId3"/>
+          <a:stretch>
+            <a:fillRect/>
+          </a:stretch>
+        </p:blipFill>
+        <p:spPr>
+          <a:xfrm>
+            <a:off x="5029200" y="1371600"/>
+            <a:ext cx="3840480" cy="2560320"/>
+          </a:xfrm>
+          <a:prstGeom prst="rect">
+            <a:avLst/>
+          </a:prstGeom>
+        </p:spPr>
+      </p:pic>
     </p:spTree>
   </p:cSld>
   <p:clrMapOvr>
@@ -26841,6 +27589,10 @@
           </a:solidFill>
           <a:ln/>
         </p:spPr>
+        <p:txBody>
+          <a:bodyPr/>
+          <a:p/>
+        </p:txBody>
       </p:sp>
       <p:sp>
         <p:nvSpPr>
@@ -26946,6 +27698,10 @@
             </a:outerShdw>
           </a:effectLst>
         </p:spPr>
+        <p:txBody>
+          <a:bodyPr/>
+          <a:p/>
+        </p:txBody>
       </p:sp>
       <p:sp>
         <p:nvSpPr>
@@ -26966,6 +27722,10 @@
           </a:solidFill>
           <a:ln/>
         </p:spPr>
+        <p:txBody>
+          <a:bodyPr/>
+          <a:p/>
+        </p:txBody>
       </p:sp>
       <p:sp>
         <p:nvSpPr>
@@ -27149,6 +27909,10 @@
             </a:outerShdw>
           </a:effectLst>
         </p:spPr>
+        <p:txBody>
+          <a:bodyPr/>
+          <a:p/>
+        </p:txBody>
       </p:sp>
       <p:sp>
         <p:nvSpPr>
@@ -27169,6 +27933,10 @@
           </a:solidFill>
           <a:ln/>
         </p:spPr>
+        <p:txBody>
+          <a:bodyPr/>
+          <a:p/>
+        </p:txBody>
       </p:sp>
       <p:sp>
         <p:nvSpPr>
@@ -27352,6 +28120,10 @@
             </a:outerShdw>
           </a:effectLst>
         </p:spPr>
+        <p:txBody>
+          <a:bodyPr/>
+          <a:p/>
+        </p:txBody>
       </p:sp>
       <p:sp>
         <p:nvSpPr>
@@ -27372,6 +28144,10 @@
           </a:solidFill>
           <a:ln/>
         </p:spPr>
+        <p:txBody>
+          <a:bodyPr/>
+          <a:p/>
+        </p:txBody>
       </p:sp>
       <p:sp>
         <p:nvSpPr>
@@ -27555,6 +28331,10 @@
             </a:outerShdw>
           </a:effectLst>
         </p:spPr>
+        <p:txBody>
+          <a:bodyPr/>
+          <a:p/>
+        </p:txBody>
       </p:sp>
       <p:sp>
         <p:nvSpPr>
@@ -27575,6 +28355,10 @@
           </a:solidFill>
           <a:ln/>
         </p:spPr>
+        <p:txBody>
+          <a:bodyPr/>
+          <a:p/>
+        </p:txBody>
       </p:sp>
       <p:sp>
         <p:nvSpPr>
@@ -27719,6 +28503,10 @@
             </a:outerShdw>
           </a:effectLst>
         </p:spPr>
+        <p:txBody>
+          <a:bodyPr/>
+          <a:p/>
+        </p:txBody>
       </p:sp>
       <p:sp>
         <p:nvSpPr>
@@ -27739,6 +28527,10 @@
           </a:solidFill>
           <a:ln/>
         </p:spPr>
+        <p:txBody>
+          <a:bodyPr/>
+          <a:p/>
+        </p:txBody>
       </p:sp>
       <p:sp>
         <p:nvSpPr>
@@ -27857,6 +28649,30 @@
           </a:p>
         </p:txBody>
       </p:sp>
+      <p:pic>
+        <p:nvPicPr>
+          <p:cNvPr id="33" name="Picture 32" descr="deck-speed-comparison.png"/>
+          <p:cNvPicPr>
+            <a:picLocks noChangeAspect="1"/>
+          </p:cNvPicPr>
+          <p:nvPr/>
+        </p:nvPicPr>
+        <p:blipFill>
+          <a:blip r:embed="rId3"/>
+          <a:stretch>
+            <a:fillRect/>
+          </a:stretch>
+        </p:blipFill>
+        <p:spPr>
+          <a:xfrm>
+            <a:off x="5029200" y="1371600"/>
+            <a:ext cx="3840480" cy="2560320"/>
+          </a:xfrm>
+          <a:prstGeom prst="rect">
+            <a:avLst/>
+          </a:prstGeom>
+        </p:spPr>
+      </p:pic>
     </p:spTree>
   </p:cSld>
   <p:clrMapOvr>
@@ -27908,6 +28724,10 @@
           </a:solidFill>
           <a:ln/>
         </p:spPr>
+        <p:txBody>
+          <a:bodyPr/>
+          <a:p/>
+        </p:txBody>
       </p:sp>
       <p:sp>
         <p:nvSpPr>
@@ -28013,6 +28833,10 @@
             </a:outerShdw>
           </a:effectLst>
         </p:spPr>
+        <p:txBody>
+          <a:bodyPr/>
+          <a:p/>
+        </p:txBody>
       </p:sp>
       <p:sp>
         <p:nvSpPr>
@@ -28033,6 +28857,10 @@
           </a:solidFill>
           <a:ln/>
         </p:spPr>
+        <p:txBody>
+          <a:bodyPr/>
+          <a:p/>
+        </p:txBody>
       </p:sp>
       <p:sp>
         <p:nvSpPr>
@@ -28177,6 +29005,10 @@
             </a:outerShdw>
           </a:effectLst>
         </p:spPr>
+        <p:txBody>
+          <a:bodyPr/>
+          <a:p/>
+        </p:txBody>
       </p:sp>
       <p:sp>
         <p:nvSpPr>
@@ -28197,6 +29029,10 @@
           </a:solidFill>
           <a:ln/>
         </p:spPr>
+        <p:txBody>
+          <a:bodyPr/>
+          <a:p/>
+        </p:txBody>
       </p:sp>
       <p:sp>
         <p:nvSpPr>
@@ -28341,6 +29177,10 @@
             </a:outerShdw>
           </a:effectLst>
         </p:spPr>
+        <p:txBody>
+          <a:bodyPr/>
+          <a:p/>
+        </p:txBody>
       </p:sp>
       <p:sp>
         <p:nvSpPr>
@@ -28361,6 +29201,10 @@
           </a:solidFill>
           <a:ln/>
         </p:spPr>
+        <p:txBody>
+          <a:bodyPr/>
+          <a:p/>
+        </p:txBody>
       </p:sp>
       <p:sp>
         <p:nvSpPr>
@@ -28505,6 +29349,10 @@
             </a:outerShdw>
           </a:effectLst>
         </p:spPr>
+        <p:txBody>
+          <a:bodyPr/>
+          <a:p/>
+        </p:txBody>
       </p:sp>
       <p:sp>
         <p:nvSpPr>
@@ -28525,6 +29373,10 @@
           </a:solidFill>
           <a:ln/>
         </p:spPr>
+        <p:txBody>
+          <a:bodyPr/>
+          <a:p/>
+        </p:txBody>
       </p:sp>
       <p:sp>
         <p:nvSpPr>
@@ -28669,6 +29521,10 @@
             </a:outerShdw>
           </a:effectLst>
         </p:spPr>
+        <p:txBody>
+          <a:bodyPr/>
+          <a:p/>
+        </p:txBody>
       </p:sp>
       <p:sp>
         <p:nvSpPr>
@@ -28689,6 +29545,10 @@
           </a:solidFill>
           <a:ln/>
         </p:spPr>
+        <p:txBody>
+          <a:bodyPr/>
+          <a:p/>
+        </p:txBody>
       </p:sp>
       <p:sp>
         <p:nvSpPr>
@@ -28826,6 +29686,10 @@
           </a:solidFill>
           <a:ln/>
         </p:spPr>
+        <p:txBody>
+          <a:bodyPr/>
+          <a:p/>
+        </p:txBody>
       </p:sp>
       <p:sp>
         <p:nvSpPr>
@@ -28917,6 +29781,10 @@
           </a:solidFill>
           <a:ln/>
         </p:spPr>
+        <p:txBody>
+          <a:bodyPr/>
+          <a:p/>
+        </p:txBody>
       </p:sp>
       <p:sp>
         <p:nvSpPr>
@@ -29022,6 +29890,10 @@
             </a:outerShdw>
           </a:effectLst>
         </p:spPr>
+        <p:txBody>
+          <a:bodyPr/>
+          <a:p/>
+        </p:txBody>
       </p:sp>
       <p:sp>
         <p:nvSpPr>
@@ -29042,6 +29914,10 @@
           </a:solidFill>
           <a:ln/>
         </p:spPr>
+        <p:txBody>
+          <a:bodyPr/>
+          <a:p/>
+        </p:txBody>
       </p:sp>
       <p:sp>
         <p:nvSpPr>
@@ -29576,6 +30452,10 @@
             </a:outerShdw>
           </a:effectLst>
         </p:spPr>
+        <p:txBody>
+          <a:bodyPr/>
+          <a:p/>
+        </p:txBody>
       </p:sp>
       <p:sp>
         <p:nvSpPr>
@@ -29596,6 +30476,10 @@
           </a:solidFill>
           <a:ln/>
         </p:spPr>
+        <p:txBody>
+          <a:bodyPr/>
+          <a:p/>
+        </p:txBody>
       </p:sp>
       <p:sp>
         <p:nvSpPr>
@@ -30130,6 +31014,10 @@
             </a:outerShdw>
           </a:effectLst>
         </p:spPr>
+        <p:txBody>
+          <a:bodyPr/>
+          <a:p/>
+        </p:txBody>
       </p:sp>
       <p:sp>
         <p:nvSpPr>
@@ -30150,6 +31038,10 @@
           </a:solidFill>
           <a:ln/>
         </p:spPr>
+        <p:txBody>
+          <a:bodyPr/>
+          <a:p/>
+        </p:txBody>
       </p:sp>
       <p:sp>
         <p:nvSpPr>
@@ -30677,6 +31569,10 @@
           </a:solidFill>
           <a:ln/>
         </p:spPr>
+        <p:txBody>
+          <a:bodyPr/>
+          <a:p/>
+        </p:txBody>
       </p:sp>
       <p:sp>
         <p:nvSpPr>
